--- a/lessons/8-7/slides.pptx
+++ b/lessons/8-7/slides.pptx
@@ -10925,7 +10925,7 @@
       </p:sp>
       <p:sp>
         <p:nvSpPr>
-          <p:cNvPr id="20" name="Shape 18"/>
+          <p:cNvPr id="20" name="Text 18"/>
           <p:cNvSpPr/>
           <p:nvPr/>
         </p:nvSpPr>
@@ -10946,33 +10946,7 @@
             <a:solidFill>
               <a:srgbClr val="D6DBDF"/>
             </a:solidFill>
-            <a:prstDash val="solid"/>
           </a:ln>
-          <a:effectLst>
-            <a:outerShdw sx="100000" sy="100000" kx="0" ky="0" algn="bl" rotWithShape="0" blurRad="50800" dist="12700" dir="5400000">
-              <a:srgbClr val="1C2E42">
-                <a:alpha val="10000"/>
-              </a:srgbClr>
-            </a:outerShdw>
-          </a:effectLst>
-        </p:spPr>
-      </p:sp>
-      <p:sp>
-        <p:nvSpPr>
-          <p:cNvPr id="21" name="Text 19"/>
-          <p:cNvSpPr/>
-          <p:nvPr/>
-        </p:nvSpPr>
-        <p:spPr>
-          <a:xfrm>
-            <a:off x="685800" y="1481328"/>
-            <a:ext cx="1447800" cy="384048"/>
-          </a:xfrm>
-          <a:prstGeom prst="rect">
-            <a:avLst/>
-          </a:prstGeom>
-          <a:noFill/>
-          <a:ln/>
         </p:spPr>
         <p:txBody>
           <a:bodyPr wrap="square" rtlCol="0" anchor="ctr"/>
@@ -10982,7 +10956,7 @@
               <a:buNone/>
             </a:pPr>
             <a:r>
-              <a:rPr lang="en-US" sz="900" dirty="0">
+              <a:rPr lang="en-US" sz="900" b="1" dirty="0">
                 <a:solidFill>
                   <a:srgbClr val="17324D"/>
                 </a:solidFill>
@@ -10998,7 +10972,7 @@
       </p:sp>
       <p:sp>
         <p:nvSpPr>
-          <p:cNvPr id="22" name="Shape 20"/>
+          <p:cNvPr id="21" name="Text 19"/>
           <p:cNvSpPr/>
           <p:nvPr/>
         </p:nvSpPr>
@@ -11019,33 +10993,7 @@
             <a:solidFill>
               <a:srgbClr val="D6DBDF"/>
             </a:solidFill>
-            <a:prstDash val="solid"/>
           </a:ln>
-          <a:effectLst>
-            <a:outerShdw sx="100000" sy="100000" kx="0" ky="0" algn="bl" rotWithShape="0" blurRad="50800" dist="12700" dir="5400000">
-              <a:srgbClr val="1C2E42">
-                <a:alpha val="10000"/>
-              </a:srgbClr>
-            </a:outerShdw>
-          </a:effectLst>
-        </p:spPr>
-      </p:sp>
-      <p:sp>
-        <p:nvSpPr>
-          <p:cNvPr id="23" name="Text 21"/>
-          <p:cNvSpPr/>
-          <p:nvPr/>
-        </p:nvSpPr>
-        <p:spPr>
-          <a:xfrm>
-            <a:off x="2453640" y="1481328"/>
-            <a:ext cx="1447800" cy="384048"/>
-          </a:xfrm>
-          <a:prstGeom prst="rect">
-            <a:avLst/>
-          </a:prstGeom>
-          <a:noFill/>
-          <a:ln/>
         </p:spPr>
         <p:txBody>
           <a:bodyPr wrap="square" rtlCol="0" anchor="ctr"/>
@@ -11055,7 +11003,7 @@
               <a:buNone/>
             </a:pPr>
             <a:r>
-              <a:rPr lang="en-US" sz="900" dirty="0">
+              <a:rPr lang="en-US" sz="900" b="1" dirty="0">
                 <a:solidFill>
                   <a:srgbClr val="17324D"/>
                 </a:solidFill>
@@ -11071,7 +11019,7 @@
       </p:sp>
       <p:sp>
         <p:nvSpPr>
-          <p:cNvPr id="24" name="Shape 22"/>
+          <p:cNvPr id="22" name="Text 20"/>
           <p:cNvSpPr/>
           <p:nvPr/>
         </p:nvSpPr>
@@ -11092,33 +11040,7 @@
             <a:solidFill>
               <a:srgbClr val="D6DBDF"/>
             </a:solidFill>
-            <a:prstDash val="solid"/>
           </a:ln>
-          <a:effectLst>
-            <a:outerShdw sx="100000" sy="100000" kx="0" ky="0" algn="bl" rotWithShape="0" blurRad="50800" dist="12700" dir="5400000">
-              <a:srgbClr val="1C2E42">
-                <a:alpha val="10000"/>
-              </a:srgbClr>
-            </a:outerShdw>
-          </a:effectLst>
-        </p:spPr>
-      </p:sp>
-      <p:sp>
-        <p:nvSpPr>
-          <p:cNvPr id="25" name="Text 23"/>
-          <p:cNvSpPr/>
-          <p:nvPr/>
-        </p:nvSpPr>
-        <p:spPr>
-          <a:xfrm>
-            <a:off x="4221480" y="1481328"/>
-            <a:ext cx="1447800" cy="384048"/>
-          </a:xfrm>
-          <a:prstGeom prst="rect">
-            <a:avLst/>
-          </a:prstGeom>
-          <a:noFill/>
-          <a:ln/>
         </p:spPr>
         <p:txBody>
           <a:bodyPr wrap="square" rtlCol="0" anchor="ctr"/>
@@ -11128,7 +11050,7 @@
               <a:buNone/>
             </a:pPr>
             <a:r>
-              <a:rPr lang="en-US" sz="900" dirty="0">
+              <a:rPr lang="en-US" sz="900" b="1" dirty="0">
                 <a:solidFill>
                   <a:srgbClr val="17324D"/>
                 </a:solidFill>
@@ -11144,7 +11066,7 @@
       </p:sp>
       <p:sp>
         <p:nvSpPr>
-          <p:cNvPr id="26" name="Shape 24"/>
+          <p:cNvPr id="23" name="Text 21"/>
           <p:cNvSpPr/>
           <p:nvPr/>
         </p:nvSpPr>
@@ -11165,33 +11087,7 @@
             <a:solidFill>
               <a:srgbClr val="D6DBDF"/>
             </a:solidFill>
-            <a:prstDash val="solid"/>
           </a:ln>
-          <a:effectLst>
-            <a:outerShdw sx="100000" sy="100000" kx="0" ky="0" algn="bl" rotWithShape="0" blurRad="50800" dist="12700" dir="5400000">
-              <a:srgbClr val="1C2E42">
-                <a:alpha val="10000"/>
-              </a:srgbClr>
-            </a:outerShdw>
-          </a:effectLst>
-        </p:spPr>
-      </p:sp>
-      <p:sp>
-        <p:nvSpPr>
-          <p:cNvPr id="27" name="Text 25"/>
-          <p:cNvSpPr/>
-          <p:nvPr/>
-        </p:nvSpPr>
-        <p:spPr>
-          <a:xfrm>
-            <a:off x="685800" y="1975104"/>
-            <a:ext cx="1447800" cy="384048"/>
-          </a:xfrm>
-          <a:prstGeom prst="rect">
-            <a:avLst/>
-          </a:prstGeom>
-          <a:noFill/>
-          <a:ln/>
         </p:spPr>
         <p:txBody>
           <a:bodyPr wrap="square" rtlCol="0" anchor="ctr"/>
@@ -11201,7 +11097,7 @@
               <a:buNone/>
             </a:pPr>
             <a:r>
-              <a:rPr lang="en-US" sz="900" dirty="0">
+              <a:rPr lang="en-US" sz="900" b="1" dirty="0">
                 <a:solidFill>
                   <a:srgbClr val="17324D"/>
                 </a:solidFill>
@@ -11217,7 +11113,7 @@
       </p:sp>
       <p:sp>
         <p:nvSpPr>
-          <p:cNvPr id="28" name="Shape 26"/>
+          <p:cNvPr id="24" name="Text 22"/>
           <p:cNvSpPr/>
           <p:nvPr/>
         </p:nvSpPr>
@@ -11238,33 +11134,7 @@
             <a:solidFill>
               <a:srgbClr val="D6DBDF"/>
             </a:solidFill>
-            <a:prstDash val="solid"/>
           </a:ln>
-          <a:effectLst>
-            <a:outerShdw sx="100000" sy="100000" kx="0" ky="0" algn="bl" rotWithShape="0" blurRad="50800" dist="12700" dir="5400000">
-              <a:srgbClr val="1C2E42">
-                <a:alpha val="10000"/>
-              </a:srgbClr>
-            </a:outerShdw>
-          </a:effectLst>
-        </p:spPr>
-      </p:sp>
-      <p:sp>
-        <p:nvSpPr>
-          <p:cNvPr id="29" name="Text 27"/>
-          <p:cNvSpPr/>
-          <p:nvPr/>
-        </p:nvSpPr>
-        <p:spPr>
-          <a:xfrm>
-            <a:off x="2453640" y="1975104"/>
-            <a:ext cx="1447800" cy="384048"/>
-          </a:xfrm>
-          <a:prstGeom prst="rect">
-            <a:avLst/>
-          </a:prstGeom>
-          <a:noFill/>
-          <a:ln/>
         </p:spPr>
         <p:txBody>
           <a:bodyPr wrap="square" rtlCol="0" anchor="ctr"/>
@@ -11274,7 +11144,7 @@
               <a:buNone/>
             </a:pPr>
             <a:r>
-              <a:rPr lang="en-US" sz="900" dirty="0">
+              <a:rPr lang="en-US" sz="900" b="1" dirty="0">
                 <a:solidFill>
                   <a:srgbClr val="17324D"/>
                 </a:solidFill>
@@ -11290,7 +11160,7 @@
       </p:sp>
       <p:sp>
         <p:nvSpPr>
-          <p:cNvPr id="30" name="Shape 28"/>
+          <p:cNvPr id="25" name="Text 23"/>
           <p:cNvSpPr/>
           <p:nvPr/>
         </p:nvSpPr>
@@ -11311,33 +11181,7 @@
             <a:solidFill>
               <a:srgbClr val="D6DBDF"/>
             </a:solidFill>
-            <a:prstDash val="solid"/>
           </a:ln>
-          <a:effectLst>
-            <a:outerShdw sx="100000" sy="100000" kx="0" ky="0" algn="bl" rotWithShape="0" blurRad="50800" dist="12700" dir="5400000">
-              <a:srgbClr val="1C2E42">
-                <a:alpha val="10000"/>
-              </a:srgbClr>
-            </a:outerShdw>
-          </a:effectLst>
-        </p:spPr>
-      </p:sp>
-      <p:sp>
-        <p:nvSpPr>
-          <p:cNvPr id="31" name="Text 29"/>
-          <p:cNvSpPr/>
-          <p:nvPr/>
-        </p:nvSpPr>
-        <p:spPr>
-          <a:xfrm>
-            <a:off x="4221480" y="1975104"/>
-            <a:ext cx="1447800" cy="384048"/>
-          </a:xfrm>
-          <a:prstGeom prst="rect">
-            <a:avLst/>
-          </a:prstGeom>
-          <a:noFill/>
-          <a:ln/>
         </p:spPr>
         <p:txBody>
           <a:bodyPr wrap="square" rtlCol="0" anchor="ctr"/>
@@ -11347,7 +11191,7 @@
               <a:buNone/>
             </a:pPr>
             <a:r>
-              <a:rPr lang="en-US" sz="900" dirty="0">
+              <a:rPr lang="en-US" sz="900" b="1" dirty="0">
                 <a:solidFill>
                   <a:srgbClr val="17324D"/>
                 </a:solidFill>
@@ -11363,7 +11207,7 @@
       </p:sp>
       <p:sp>
         <p:nvSpPr>
-          <p:cNvPr id="32" name="Shape 30"/>
+          <p:cNvPr id="26" name="Shape 24"/>
           <p:cNvSpPr/>
           <p:nvPr/>
         </p:nvSpPr>
@@ -11397,7 +11241,7 @@
       </p:sp>
       <p:sp>
         <p:nvSpPr>
-          <p:cNvPr id="33" name="Text 31"/>
+          <p:cNvPr id="27" name="Text 25"/>
           <p:cNvSpPr/>
           <p:nvPr/>
         </p:nvSpPr>
@@ -11438,7 +11282,7 @@
       </p:sp>
       <p:sp>
         <p:nvSpPr>
-          <p:cNvPr id="34" name="Shape 32"/>
+          <p:cNvPr id="28" name="Shape 26"/>
           <p:cNvSpPr/>
           <p:nvPr/>
         </p:nvSpPr>
@@ -11472,7 +11316,7 @@
       </p:sp>
       <p:sp>
         <p:nvSpPr>
-          <p:cNvPr id="35" name="Text 33"/>
+          <p:cNvPr id="29" name="Text 27"/>
           <p:cNvSpPr/>
           <p:nvPr/>
         </p:nvSpPr>
@@ -11513,7 +11357,7 @@
       </p:sp>
       <p:sp>
         <p:nvSpPr>
-          <p:cNvPr id="36" name="Shape 34"/>
+          <p:cNvPr id="30" name="Shape 28"/>
           <p:cNvSpPr/>
           <p:nvPr/>
         </p:nvSpPr>
@@ -11547,7 +11391,7 @@
       </p:sp>
       <p:sp>
         <p:nvSpPr>
-          <p:cNvPr id="37" name="Text 35"/>
+          <p:cNvPr id="31" name="Text 29"/>
           <p:cNvSpPr/>
           <p:nvPr/>
         </p:nvSpPr>
@@ -11588,7 +11432,7 @@
       </p:sp>
       <p:sp>
         <p:nvSpPr>
-          <p:cNvPr id="38" name="Shape 36"/>
+          <p:cNvPr id="32" name="Shape 30"/>
           <p:cNvSpPr/>
           <p:nvPr/>
         </p:nvSpPr>
@@ -11622,7 +11466,7 @@
       </p:sp>
       <p:sp>
         <p:nvSpPr>
-          <p:cNvPr id="39" name="Text 37"/>
+          <p:cNvPr id="33" name="Text 31"/>
           <p:cNvSpPr/>
           <p:nvPr/>
         </p:nvSpPr>
@@ -11663,7 +11507,7 @@
       </p:sp>
       <p:sp>
         <p:nvSpPr>
-          <p:cNvPr id="40" name="Text 38"/>
+          <p:cNvPr id="34" name="Text 32"/>
           <p:cNvSpPr/>
           <p:nvPr/>
         </p:nvSpPr>
@@ -11702,7 +11546,7 @@
       </p:sp>
       <p:sp>
         <p:nvSpPr>
-          <p:cNvPr id="41" name="Shape 39"/>
+          <p:cNvPr id="35" name="Shape 33"/>
           <p:cNvSpPr/>
           <p:nvPr/>
         </p:nvSpPr>
@@ -11725,7 +11569,7 @@
       </p:sp>
       <p:sp>
         <p:nvSpPr>
-          <p:cNvPr id="42" name="Shape 40"/>
+          <p:cNvPr id="36" name="Shape 34"/>
           <p:cNvSpPr/>
           <p:nvPr/>
         </p:nvSpPr>
@@ -11748,7 +11592,7 @@
       </p:sp>
       <p:sp>
         <p:nvSpPr>
-          <p:cNvPr id="43" name="Shape 41"/>
+          <p:cNvPr id="37" name="Shape 35"/>
           <p:cNvSpPr/>
           <p:nvPr/>
         </p:nvSpPr>
@@ -11771,7 +11615,7 @@
       </p:sp>
       <p:sp>
         <p:nvSpPr>
-          <p:cNvPr id="44" name="Shape 42"/>
+          <p:cNvPr id="38" name="Shape 36"/>
           <p:cNvSpPr/>
           <p:nvPr/>
         </p:nvSpPr>
@@ -11794,7 +11638,7 @@
       </p:sp>
       <p:sp>
         <p:nvSpPr>
-          <p:cNvPr id="45" name="Shape 43"/>
+          <p:cNvPr id="39" name="Shape 37"/>
           <p:cNvSpPr/>
           <p:nvPr/>
         </p:nvSpPr>

--- a/lessons/8-7/slides.pptx
+++ b/lessons/8-7/slides.pptx
@@ -2584,7 +2584,7 @@
                 <a:ea typeface="Outfit" pitchFamily="34" charset="-122"/>
                 <a:cs typeface="Outfit" pitchFamily="34" charset="-120"/>
               </a:rPr>
-              <a:t>6.SP.2</a:t>
+              <a:t>6.DS.3</a:t>
             </a:r>
             <a:endParaRPr lang="en-US" sz="1000" dirty="0"/>
           </a:p>
@@ -3307,7 +3307,7 @@
                 <a:ea typeface="Outfit" pitchFamily="34" charset="-122"/>
                 <a:cs typeface="Outfit" pitchFamily="34" charset="-120"/>
               </a:rPr>
-              <a:t>6.SP.2</a:t>
+              <a:t>6.DS.3</a:t>
             </a:r>
             <a:endParaRPr lang="en-US" sz="900" dirty="0"/>
           </a:p>
@@ -4436,7 +4436,7 @@
                 <a:ea typeface="Outfit" pitchFamily="34" charset="-122"/>
                 <a:cs typeface="Outfit" pitchFamily="34" charset="-120"/>
               </a:rPr>
-              <a:t>6.SP.2</a:t>
+              <a:t>6.DS.3</a:t>
             </a:r>
             <a:endParaRPr lang="en-US" sz="900" dirty="0"/>
           </a:p>
@@ -5715,7 +5715,7 @@
                 <a:ea typeface="Outfit" pitchFamily="34" charset="-122"/>
                 <a:cs typeface="Outfit" pitchFamily="34" charset="-120"/>
               </a:rPr>
-              <a:t>6.SP.2</a:t>
+              <a:t>6.DS.3</a:t>
             </a:r>
             <a:endParaRPr lang="en-US" sz="900" dirty="0"/>
           </a:p>
@@ -7051,7 +7051,7 @@
                 <a:ea typeface="Outfit" pitchFamily="34" charset="-122"/>
                 <a:cs typeface="Outfit" pitchFamily="34" charset="-120"/>
               </a:rPr>
-              <a:t>6.SP.2</a:t>
+              <a:t>6.DS.3</a:t>
             </a:r>
             <a:endParaRPr lang="en-US" sz="900" dirty="0"/>
           </a:p>
@@ -8247,7 +8247,7 @@
                 <a:ea typeface="Outfit" pitchFamily="34" charset="-122"/>
                 <a:cs typeface="Outfit" pitchFamily="34" charset="-120"/>
               </a:rPr>
-              <a:t>6.SP.2</a:t>
+              <a:t>6.DS.3</a:t>
             </a:r>
             <a:endParaRPr lang="en-US" sz="900" dirty="0"/>
           </a:p>
@@ -9309,7 +9309,7 @@
                 <a:ea typeface="Outfit" pitchFamily="34" charset="-122"/>
                 <a:cs typeface="Outfit" pitchFamily="34" charset="-120"/>
               </a:rPr>
-              <a:t>6.SP.2</a:t>
+              <a:t>6.DS.3</a:t>
             </a:r>
             <a:endParaRPr lang="en-US" sz="900" dirty="0"/>
           </a:p>
@@ -9986,7 +9986,7 @@
                 <a:ea typeface="Hanken Grotesk" pitchFamily="34" charset="-122"/>
                 <a:cs typeface="Hanken Grotesk" pitchFamily="34" charset="-120"/>
               </a:rPr>
-              <a:t>Marathon times cluster at 3.5-4.5 hours, with elites at 2.0-2.5 and a long tail of slower runners at 5-7 hours. What is the shape, and should the reporter use the mean or median for a 'typical' time?</a:t>
+              <a:t>Marathon times cluster at 3.5-4.5 hours, with a long tail of slower runners stretching out to 5-7 hours. What is the shape, and should the reporter use the mean or median for a 'typical' time?</a:t>
             </a:r>
             <a:endParaRPr lang="en-US" sz="1000" dirty="0"/>
           </a:p>
@@ -10274,7 +10274,7 @@
                 <a:ea typeface="Outfit" pitchFamily="34" charset="-122"/>
                 <a:cs typeface="Outfit" pitchFamily="34" charset="-120"/>
               </a:rPr>
-              <a:t>6.SP.2</a:t>
+              <a:t>6.DS.3</a:t>
             </a:r>
             <a:endParaRPr lang="en-US" sz="900" dirty="0"/>
           </a:p>
@@ -11191,7 +11191,7 @@
                 <a:ea typeface="Outfit" pitchFamily="34" charset="-122"/>
                 <a:cs typeface="Outfit" pitchFamily="34" charset="-120"/>
               </a:rPr>
-              <a:t>6.SP.2</a:t>
+              <a:t>6.DS.3</a:t>
             </a:r>
             <a:endParaRPr lang="en-US" sz="900" dirty="0"/>
           </a:p>
@@ -12319,7 +12319,7 @@
                 <a:ea typeface="Outfit" pitchFamily="34" charset="-122"/>
                 <a:cs typeface="Outfit" pitchFamily="34" charset="-120"/>
               </a:rPr>
-              <a:t>6.SP.2</a:t>
+              <a:t>6.DS.3</a:t>
             </a:r>
             <a:endParaRPr lang="en-US" sz="900" dirty="0"/>
           </a:p>
@@ -13752,7 +13752,7 @@
                 <a:ea typeface="Outfit" pitchFamily="34" charset="-122"/>
                 <a:cs typeface="Outfit" pitchFamily="34" charset="-120"/>
               </a:rPr>
-              <a:t>6.SP.2</a:t>
+              <a:t>6.DS.3</a:t>
             </a:r>
             <a:endParaRPr lang="en-US" sz="900" dirty="0"/>
           </a:p>
@@ -14566,7 +14566,7 @@
                 <a:ea typeface="Outfit" pitchFamily="34" charset="-122"/>
                 <a:cs typeface="Outfit" pitchFamily="34" charset="-120"/>
               </a:rPr>
-              <a:t>6.SP.2</a:t>
+              <a:t>6.DS.3</a:t>
             </a:r>
             <a:endParaRPr lang="en-US" sz="900" dirty="0"/>
           </a:p>
@@ -15673,7 +15673,7 @@
                 <a:ea typeface="Outfit" pitchFamily="34" charset="-122"/>
                 <a:cs typeface="Outfit" pitchFamily="34" charset="-120"/>
               </a:rPr>
-              <a:t>6.SP.2</a:t>
+              <a:t>6.DS.3</a:t>
             </a:r>
             <a:endParaRPr lang="en-US" sz="900" dirty="0"/>
           </a:p>
@@ -16780,7 +16780,7 @@
                 <a:ea typeface="Outfit" pitchFamily="34" charset="-122"/>
                 <a:cs typeface="Outfit" pitchFamily="34" charset="-120"/>
               </a:rPr>
-              <a:t>6.SP.2</a:t>
+              <a:t>6.DS.3</a:t>
             </a:r>
             <a:endParaRPr lang="en-US" sz="900" dirty="0"/>
           </a:p>
@@ -17196,7 +17196,7 @@
                 <a:ea typeface="Hanken Grotesk" pitchFamily="34" charset="-122"/>
                 <a:cs typeface="Hanken Grotesk" pitchFamily="34" charset="-120"/>
               </a:rPr>
-              <a:t>Marathon times cluster at 3.5-4.5 hours, with elites at 2.0-2.5 and a long tail of slower runners at 5-7 hours. What is the shape, and should the reporter use the mean or median for a 'typical' time?</a:t>
+              <a:t>Marathon times cluster at 3.5-4.5 hours, with a long tail of slower runners stretching out to 5-7 hours. What is the shape, and should the reporter use the mean or median for a 'typical' time?</a:t>
             </a:r>
             <a:endParaRPr lang="en-US" sz="1400" dirty="0"/>
           </a:p>
@@ -17887,7 +17887,7 @@
                 <a:ea typeface="Outfit" pitchFamily="34" charset="-122"/>
                 <a:cs typeface="Outfit" pitchFamily="34" charset="-120"/>
               </a:rPr>
-              <a:t>6.SP.2</a:t>
+              <a:t>6.DS.3</a:t>
             </a:r>
             <a:endParaRPr lang="en-US" sz="900" dirty="0"/>
           </a:p>
@@ -18994,7 +18994,7 @@
                 <a:ea typeface="Outfit" pitchFamily="34" charset="-122"/>
                 <a:cs typeface="Outfit" pitchFamily="34" charset="-120"/>
               </a:rPr>
-              <a:t>6.SP.2</a:t>
+              <a:t>6.DS.3</a:t>
             </a:r>
             <a:endParaRPr lang="en-US" sz="900" dirty="0"/>
           </a:p>
@@ -20054,7 +20054,7 @@
                 <a:ea typeface="Outfit" pitchFamily="34" charset="-122"/>
                 <a:cs typeface="Outfit" pitchFamily="34" charset="-120"/>
               </a:rPr>
-              <a:t>6.SP.2</a:t>
+              <a:t>6.DS.3</a:t>
             </a:r>
             <a:endParaRPr lang="en-US" sz="900" dirty="0"/>
           </a:p>
@@ -21042,7 +21042,7 @@
                 <a:ea typeface="Outfit" pitchFamily="34" charset="-122"/>
                 <a:cs typeface="Outfit" pitchFamily="34" charset="-120"/>
               </a:rPr>
-              <a:t>6.SP.2</a:t>
+              <a:t>6.DS.3</a:t>
             </a:r>
             <a:endParaRPr lang="en-US" sz="900" dirty="0"/>
           </a:p>
